--- a/assets/materials/L1/L1-slides.pptx
+++ b/assets/materials/L1/L1-slides.pptx
@@ -9190,7 +9190,7 @@
       </p:sp>
       <p:pic>
         <p:nvPicPr>
-          <p:cNvPr id="3" name="Image 0" descr="/var/folders/9c/bpqwjkxs5lx9pmncd7cyl1kh0000gn/T/tmp.tKaXtR8BGD/commission-retainer-slide.png">    </p:cNvPr>
+          <p:cNvPr id="3" name="Image 0" descr="/var/folders/9c/bpqwjkxs5lx9pmncd7cyl1kh0000gn/T/tmp.djAiW4rtbI/commission-retainer-slide.png">    </p:cNvPr>
           <p:cNvPicPr>
             <a:picLocks noChangeAspect="1"/>
           </p:cNvPicPr>

--- a/assets/materials/L1/L1-slides.pptx
+++ b/assets/materials/L1/L1-slides.pptx
@@ -9190,7 +9190,7 @@
       </p:sp>
       <p:pic>
         <p:nvPicPr>
-          <p:cNvPr id="3" name="Image 0" descr="/var/folders/9c/bpqwjkxs5lx9pmncd7cyl1kh0000gn/T/tmp.djAiW4rtbI/commission-retainer-slide.png">    </p:cNvPr>
+          <p:cNvPr id="3" name="Image 0" descr="/var/folders/9c/bpqwjkxs5lx9pmncd7cyl1kh0000gn/T/tmp.A4QpzxHeui/commission-retainer-slide.png">    </p:cNvPr>
           <p:cNvPicPr>
             <a:picLocks noChangeAspect="1"/>
           </p:cNvPicPr>
